--- a/public/fun/pack/pptx/wedding/결혼식_02_러브스토리중심_입춘날마루.pptx
+++ b/public/fun/pack/pptx/wedding/결혼식_02_러브스토리중심_입춘날마루.pptx
@@ -3347,7 +3347,7 @@
             <a:r>
               <a:rPr sz="3600" b="1" i="0">
                 <a:solidFill>
-                  <a:srgbClr val="74591B"/>
+                  <a:srgbClr val="72591D"/>
                 </a:solidFill>
               </a:rPr>
               <a:t>저희 결혼합니다</a:t>
@@ -3385,7 +3385,7 @@
             <a:r>
               <a:rPr sz="1700" b="0" i="1">
                 <a:solidFill>
-                  <a:srgbClr val="74591B"/>
+                  <a:srgbClr val="72591D"/>
                 </a:solidFill>
               </a:rPr>
               <a:t>처음 만난 날부터 오늘까지 적어 봤습니다</a:t>
@@ -3460,7 +3460,7 @@
     <p:bg>
       <p:bgPr>
         <a:solidFill>
-          <a:srgbClr val="FBF7EE"/>
+          <a:srgbClr val="FCF9F3"/>
         </a:solidFill>
         <a:effectLst/>
       </p:bgPr>
@@ -3489,7 +3489,7 @@
           <a:noFill/>
           <a:ln w="28575">
             <a:solidFill>
-              <a:srgbClr val="C6992F"/>
+              <a:srgbClr val="DFAD3A"/>
             </a:solidFill>
           </a:ln>
         </p:spPr>
@@ -3518,7 +3518,7 @@
           <a:noFill/>
           <a:ln w="9525">
             <a:solidFill>
-              <a:srgbClr val="F5E9CC"/>
+              <a:srgbClr val="F7EDD4"/>
             </a:solidFill>
           </a:ln>
         </p:spPr>
@@ -3560,7 +3560,7 @@
             <a:r>
               <a:rPr sz="3000" b="1" i="0">
                 <a:solidFill>
-                  <a:srgbClr val="74591B"/>
+                  <a:srgbClr val="72591D"/>
                 </a:solidFill>
               </a:rPr>
               <a:t>신랑 · 신부 소개</a:t>
@@ -3583,11 +3583,11 @@
             <a:avLst/>
           </a:prstGeom>
           <a:solidFill>
-            <a:srgbClr val="F5E9CC"/>
+            <a:srgbClr val="F7EDD4"/>
           </a:solidFill>
           <a:ln w="19050">
             <a:solidFill>
-              <a:srgbClr val="C6992F"/>
+              <a:srgbClr val="DFAD3A"/>
             </a:solidFill>
             <a:prstDash val="dash"/>
           </a:ln>
@@ -3606,7 +3606,7 @@
             <a:r>
               <a:rPr sz="1200" b="0" i="0">
                 <a:solidFill>
-                  <a:srgbClr val="74591B"/>
+                  <a:srgbClr val="72591D"/>
                 </a:solidFill>
               </a:rPr>
               <a:t>사진</a:t>
@@ -3644,7 +3644,7 @@
             <a:r>
               <a:rPr sz="1600" b="1" i="0">
                 <a:solidFill>
-                  <a:srgbClr val="74591B"/>
+                  <a:srgbClr val="72591D"/>
                 </a:solidFill>
               </a:rPr>
               <a:t>신랑</a:t>
@@ -3735,11 +3735,11 @@
             <a:avLst/>
           </a:prstGeom>
           <a:solidFill>
-            <a:srgbClr val="F5E9CC"/>
+            <a:srgbClr val="F7EDD4"/>
           </a:solidFill>
           <a:ln w="19050">
             <a:solidFill>
-              <a:srgbClr val="C6992F"/>
+              <a:srgbClr val="DFAD3A"/>
             </a:solidFill>
             <a:prstDash val="dash"/>
           </a:ln>
@@ -3758,7 +3758,7 @@
             <a:r>
               <a:rPr sz="1200" b="0" i="0">
                 <a:solidFill>
-                  <a:srgbClr val="74591B"/>
+                  <a:srgbClr val="72591D"/>
                 </a:solidFill>
               </a:rPr>
               <a:t>사진</a:t>
@@ -3796,7 +3796,7 @@
             <a:r>
               <a:rPr sz="1600" b="1" i="0">
                 <a:solidFill>
-                  <a:srgbClr val="74591B"/>
+                  <a:srgbClr val="72591D"/>
                 </a:solidFill>
               </a:rPr>
               <a:t>신부</a:t>
@@ -3886,7 +3886,7 @@
     <p:bg>
       <p:bgPr>
         <a:solidFill>
-          <a:srgbClr val="FBF7EE"/>
+          <a:srgbClr val="FCF9F3"/>
         </a:solidFill>
         <a:effectLst/>
       </p:bgPr>
@@ -3915,7 +3915,7 @@
           <a:noFill/>
           <a:ln w="28575">
             <a:solidFill>
-              <a:srgbClr val="C6992F"/>
+              <a:srgbClr val="DFAD3A"/>
             </a:solidFill>
           </a:ln>
         </p:spPr>
@@ -3944,7 +3944,7 @@
           <a:noFill/>
           <a:ln w="9525">
             <a:solidFill>
-              <a:srgbClr val="F5E9CC"/>
+              <a:srgbClr val="F7EDD4"/>
             </a:solidFill>
           </a:ln>
         </p:spPr>
@@ -3986,7 +3986,7 @@
             <a:r>
               <a:rPr sz="3000" b="1" i="0">
                 <a:solidFill>
-                  <a:srgbClr val="74591B"/>
+                  <a:srgbClr val="72591D"/>
                 </a:solidFill>
               </a:rPr>
               <a:t>우리의 이야기</a:t>
@@ -4009,7 +4009,7 @@
             <a:avLst/>
           </a:prstGeom>
           <a:solidFill>
-            <a:srgbClr val="F5E9CC"/>
+            <a:srgbClr val="F7EDD4"/>
           </a:solidFill>
           <a:ln>
             <a:noFill/>
@@ -4038,7 +4038,7 @@
             <a:avLst/>
           </a:prstGeom>
           <a:solidFill>
-            <a:srgbClr val="C6992F"/>
+            <a:srgbClr val="DFAD3A"/>
           </a:solidFill>
           <a:ln w="38100">
             <a:solidFill>
@@ -4084,7 +4084,7 @@
             <a:r>
               <a:rPr sz="1600" b="1" i="0">
                 <a:solidFill>
-                  <a:srgbClr val="C6992F"/>
+                  <a:srgbClr val="DFAD3A"/>
                 </a:solidFill>
               </a:rPr>
               <a:t>처음 만난 날</a:t>
@@ -4122,7 +4122,7 @@
             <a:r>
               <a:rPr sz="1800" b="1" i="0">
                 <a:solidFill>
-                  <a:srgbClr val="74591B"/>
+                  <a:srgbClr val="72591D"/>
                 </a:solidFill>
               </a:rPr>
               <a:t>첫 만남</a:t>
@@ -4183,7 +4183,7 @@
             <a:avLst/>
           </a:prstGeom>
           <a:solidFill>
-            <a:srgbClr val="C6992F"/>
+            <a:srgbClr val="DFAD3A"/>
           </a:solidFill>
           <a:ln w="38100">
             <a:solidFill>
@@ -4229,7 +4229,7 @@
             <a:r>
               <a:rPr sz="1600" b="1" i="0">
                 <a:solidFill>
-                  <a:srgbClr val="C6992F"/>
+                  <a:srgbClr val="DFAD3A"/>
                 </a:solidFill>
               </a:rPr>
               <a:t>첫 데이트</a:t>
@@ -4267,7 +4267,7 @@
             <a:r>
               <a:rPr sz="1800" b="1" i="0">
                 <a:solidFill>
-                  <a:srgbClr val="74591B"/>
+                  <a:srgbClr val="72591D"/>
                 </a:solidFill>
               </a:rPr>
               <a:t>설레던 하루</a:t>
@@ -4328,7 +4328,7 @@
             <a:avLst/>
           </a:prstGeom>
           <a:solidFill>
-            <a:srgbClr val="C6992F"/>
+            <a:srgbClr val="DFAD3A"/>
           </a:solidFill>
           <a:ln w="38100">
             <a:solidFill>
@@ -4374,7 +4374,7 @@
             <a:r>
               <a:rPr sz="1600" b="1" i="0">
                 <a:solidFill>
-                  <a:srgbClr val="C6992F"/>
+                  <a:srgbClr val="DFAD3A"/>
                 </a:solidFill>
               </a:rPr>
               <a:t>프러포즈</a:t>
@@ -4412,7 +4412,7 @@
             <a:r>
               <a:rPr sz="1800" b="1" i="0">
                 <a:solidFill>
-                  <a:srgbClr val="74591B"/>
+                  <a:srgbClr val="72591D"/>
                 </a:solidFill>
               </a:rPr>
               <a:t>평생을 약속하다</a:t>
@@ -4473,7 +4473,7 @@
             <a:avLst/>
           </a:prstGeom>
           <a:solidFill>
-            <a:srgbClr val="C6992F"/>
+            <a:srgbClr val="DFAD3A"/>
           </a:solidFill>
           <a:ln w="38100">
             <a:solidFill>
@@ -4519,7 +4519,7 @@
             <a:r>
               <a:rPr sz="1600" b="1" i="0">
                 <a:solidFill>
-                  <a:srgbClr val="C6992F"/>
+                  <a:srgbClr val="DFAD3A"/>
                 </a:solidFill>
               </a:rPr>
               <a:t>결혼</a:t>
@@ -4557,7 +4557,7 @@
             <a:r>
               <a:rPr sz="1800" b="1" i="0">
                 <a:solidFill>
-                  <a:srgbClr val="74591B"/>
+                  <a:srgbClr val="72591D"/>
                 </a:solidFill>
               </a:rPr>
               <a:t>오늘의 우리</a:t>
@@ -4617,7 +4617,7 @@
     <p:bg>
       <p:bgPr>
         <a:solidFill>
-          <a:srgbClr val="FBF7EE"/>
+          <a:srgbClr val="FCF9F3"/>
         </a:solidFill>
         <a:effectLst/>
       </p:bgPr>
@@ -4646,7 +4646,7 @@
           <a:noFill/>
           <a:ln w="28575">
             <a:solidFill>
-              <a:srgbClr val="C6992F"/>
+              <a:srgbClr val="DFAD3A"/>
             </a:solidFill>
           </a:ln>
         </p:spPr>
@@ -4675,7 +4675,7 @@
           <a:noFill/>
           <a:ln w="9525">
             <a:solidFill>
-              <a:srgbClr val="F5E9CC"/>
+              <a:srgbClr val="F7EDD4"/>
             </a:solidFill>
           </a:ln>
         </p:spPr>
@@ -4717,7 +4717,7 @@
             <a:r>
               <a:rPr sz="3000" b="1" i="0">
                 <a:solidFill>
-                  <a:srgbClr val="74591B"/>
+                  <a:srgbClr val="72591D"/>
                 </a:solidFill>
               </a:rPr>
               <a:t>우리의 첫 번째</a:t>
@@ -4742,11 +4742,11 @@
             </a:avLst>
           </a:prstGeom>
           <a:solidFill>
-            <a:srgbClr val="FBF7EE"/>
+            <a:srgbClr val="FCF9F3"/>
           </a:solidFill>
           <a:ln w="15875">
             <a:solidFill>
-              <a:srgbClr val="F5E9CC"/>
+              <a:srgbClr val="F7EDD4"/>
             </a:solidFill>
           </a:ln>
         </p:spPr>
@@ -4773,7 +4773,7 @@
             <a:avLst/>
           </a:prstGeom>
           <a:solidFill>
-            <a:srgbClr val="C6992F"/>
+            <a:srgbClr val="DFAD3A"/>
           </a:solidFill>
           <a:ln>
             <a:noFill/>
@@ -4831,7 +4831,7 @@
             <a:r>
               <a:rPr sz="1800" b="1" i="0">
                 <a:solidFill>
-                  <a:srgbClr val="74591B"/>
+                  <a:srgbClr val="72591D"/>
                 </a:solidFill>
               </a:rPr>
               <a:t>첫 여행</a:t>
@@ -4894,11 +4894,11 @@
             </a:avLst>
           </a:prstGeom>
           <a:solidFill>
-            <a:srgbClr val="FBF7EE"/>
+            <a:srgbClr val="FCF9F3"/>
           </a:solidFill>
           <a:ln w="15875">
             <a:solidFill>
-              <a:srgbClr val="F5E9CC"/>
+              <a:srgbClr val="F7EDD4"/>
             </a:solidFill>
           </a:ln>
         </p:spPr>
@@ -4925,7 +4925,7 @@
             <a:avLst/>
           </a:prstGeom>
           <a:solidFill>
-            <a:srgbClr val="C6992F"/>
+            <a:srgbClr val="DFAD3A"/>
           </a:solidFill>
           <a:ln>
             <a:noFill/>
@@ -4983,7 +4983,7 @@
             <a:r>
               <a:rPr sz="1800" b="1" i="0">
                 <a:solidFill>
-                  <a:srgbClr val="74591B"/>
+                  <a:srgbClr val="72591D"/>
                 </a:solidFill>
               </a:rPr>
               <a:t>첫 선물</a:t>
@@ -5046,11 +5046,11 @@
             </a:avLst>
           </a:prstGeom>
           <a:solidFill>
-            <a:srgbClr val="FBF7EE"/>
+            <a:srgbClr val="FCF9F3"/>
           </a:solidFill>
           <a:ln w="15875">
             <a:solidFill>
-              <a:srgbClr val="F5E9CC"/>
+              <a:srgbClr val="F7EDD4"/>
             </a:solidFill>
           </a:ln>
         </p:spPr>
@@ -5077,7 +5077,7 @@
             <a:avLst/>
           </a:prstGeom>
           <a:solidFill>
-            <a:srgbClr val="C6992F"/>
+            <a:srgbClr val="DFAD3A"/>
           </a:solidFill>
           <a:ln>
             <a:noFill/>
@@ -5135,7 +5135,7 @@
             <a:r>
               <a:rPr sz="1800" b="1" i="0">
                 <a:solidFill>
-                  <a:srgbClr val="74591B"/>
+                  <a:srgbClr val="72591D"/>
                 </a:solidFill>
               </a:rPr>
               <a:t>첫 다툼</a:t>
@@ -5198,11 +5198,11 @@
             </a:avLst>
           </a:prstGeom>
           <a:solidFill>
-            <a:srgbClr val="FBF7EE"/>
+            <a:srgbClr val="FCF9F3"/>
           </a:solidFill>
           <a:ln w="15875">
             <a:solidFill>
-              <a:srgbClr val="F5E9CC"/>
+              <a:srgbClr val="F7EDD4"/>
             </a:solidFill>
           </a:ln>
         </p:spPr>
@@ -5229,7 +5229,7 @@
             <a:avLst/>
           </a:prstGeom>
           <a:solidFill>
-            <a:srgbClr val="C6992F"/>
+            <a:srgbClr val="DFAD3A"/>
           </a:solidFill>
           <a:ln>
             <a:noFill/>
@@ -5287,7 +5287,7 @@
             <a:r>
               <a:rPr sz="1800" b="1" i="0">
                 <a:solidFill>
-                  <a:srgbClr val="74591B"/>
+                  <a:srgbClr val="72591D"/>
                 </a:solidFill>
               </a:rPr>
               <a:t>첫 약속</a:t>
@@ -5347,7 +5347,7 @@
     <p:bg>
       <p:bgPr>
         <a:solidFill>
-          <a:srgbClr val="FBF7EE"/>
+          <a:srgbClr val="FCF9F3"/>
         </a:solidFill>
         <a:effectLst/>
       </p:bgPr>
@@ -5376,7 +5376,7 @@
           <a:noFill/>
           <a:ln w="28575">
             <a:solidFill>
-              <a:srgbClr val="C6992F"/>
+              <a:srgbClr val="DFAD3A"/>
             </a:solidFill>
           </a:ln>
         </p:spPr>
@@ -5405,7 +5405,7 @@
           <a:noFill/>
           <a:ln w="9525">
             <a:solidFill>
-              <a:srgbClr val="F5E9CC"/>
+              <a:srgbClr val="F7EDD4"/>
             </a:solidFill>
           </a:ln>
         </p:spPr>
@@ -5447,7 +5447,7 @@
             <a:r>
               <a:rPr sz="3000" b="1" i="0">
                 <a:solidFill>
-                  <a:srgbClr val="74591B"/>
+                  <a:srgbClr val="72591D"/>
                 </a:solidFill>
               </a:rPr>
               <a:t>웨딩 사진</a:t>
@@ -5472,11 +5472,11 @@
             </a:avLst>
           </a:prstGeom>
           <a:solidFill>
-            <a:srgbClr val="F5E9CC"/>
+            <a:srgbClr val="F7EDD4"/>
           </a:solidFill>
           <a:ln w="19050">
             <a:solidFill>
-              <a:srgbClr val="C6992F"/>
+              <a:srgbClr val="DFAD3A"/>
             </a:solidFill>
             <a:prstDash val="dash"/>
           </a:ln>
@@ -5495,7 +5495,7 @@
             <a:r>
               <a:rPr sz="1200" b="0" i="0">
                 <a:solidFill>
-                  <a:srgbClr val="74591B"/>
+                  <a:srgbClr val="72591D"/>
                 </a:solidFill>
               </a:rPr>
               <a:t>사진 1</a:t>
@@ -5520,11 +5520,11 @@
             </a:avLst>
           </a:prstGeom>
           <a:solidFill>
-            <a:srgbClr val="F5E9CC"/>
+            <a:srgbClr val="F7EDD4"/>
           </a:solidFill>
           <a:ln w="19050">
             <a:solidFill>
-              <a:srgbClr val="C6992F"/>
+              <a:srgbClr val="DFAD3A"/>
             </a:solidFill>
             <a:prstDash val="dash"/>
           </a:ln>
@@ -5543,7 +5543,7 @@
             <a:r>
               <a:rPr sz="1200" b="0" i="0">
                 <a:solidFill>
-                  <a:srgbClr val="74591B"/>
+                  <a:srgbClr val="72591D"/>
                 </a:solidFill>
               </a:rPr>
               <a:t>사진 2</a:t>
@@ -5568,11 +5568,11 @@
             </a:avLst>
           </a:prstGeom>
           <a:solidFill>
-            <a:srgbClr val="F5E9CC"/>
+            <a:srgbClr val="F7EDD4"/>
           </a:solidFill>
           <a:ln w="19050">
             <a:solidFill>
-              <a:srgbClr val="C6992F"/>
+              <a:srgbClr val="DFAD3A"/>
             </a:solidFill>
             <a:prstDash val="dash"/>
           </a:ln>
@@ -5591,7 +5591,7 @@
             <a:r>
               <a:rPr sz="1200" b="0" i="0">
                 <a:solidFill>
-                  <a:srgbClr val="74591B"/>
+                  <a:srgbClr val="72591D"/>
                 </a:solidFill>
               </a:rPr>
               <a:t>사진 3</a:t>
@@ -5616,11 +5616,11 @@
             </a:avLst>
           </a:prstGeom>
           <a:solidFill>
-            <a:srgbClr val="F5E9CC"/>
+            <a:srgbClr val="F7EDD4"/>
           </a:solidFill>
           <a:ln w="19050">
             <a:solidFill>
-              <a:srgbClr val="C6992F"/>
+              <a:srgbClr val="DFAD3A"/>
             </a:solidFill>
             <a:prstDash val="dash"/>
           </a:ln>
@@ -5639,7 +5639,7 @@
             <a:r>
               <a:rPr sz="1200" b="0" i="0">
                 <a:solidFill>
-                  <a:srgbClr val="74591B"/>
+                  <a:srgbClr val="72591D"/>
                 </a:solidFill>
               </a:rPr>
               <a:t>사진 4</a:t>
@@ -5664,11 +5664,11 @@
             </a:avLst>
           </a:prstGeom>
           <a:solidFill>
-            <a:srgbClr val="F5E9CC"/>
+            <a:srgbClr val="F7EDD4"/>
           </a:solidFill>
           <a:ln w="19050">
             <a:solidFill>
-              <a:srgbClr val="C6992F"/>
+              <a:srgbClr val="DFAD3A"/>
             </a:solidFill>
             <a:prstDash val="dash"/>
           </a:ln>
@@ -5687,7 +5687,7 @@
             <a:r>
               <a:rPr sz="1200" b="0" i="0">
                 <a:solidFill>
-                  <a:srgbClr val="74591B"/>
+                  <a:srgbClr val="72591D"/>
                 </a:solidFill>
               </a:rPr>
               <a:t>사진 5</a:t>
@@ -5712,11 +5712,11 @@
             </a:avLst>
           </a:prstGeom>
           <a:solidFill>
-            <a:srgbClr val="F5E9CC"/>
+            <a:srgbClr val="F7EDD4"/>
           </a:solidFill>
           <a:ln w="19050">
             <a:solidFill>
-              <a:srgbClr val="C6992F"/>
+              <a:srgbClr val="DFAD3A"/>
             </a:solidFill>
             <a:prstDash val="dash"/>
           </a:ln>
@@ -5735,7 +5735,7 @@
             <a:r>
               <a:rPr sz="1200" b="0" i="0">
                 <a:solidFill>
-                  <a:srgbClr val="74591B"/>
+                  <a:srgbClr val="72591D"/>
                 </a:solidFill>
               </a:rPr>
               <a:t>사진 6</a:t>
@@ -5815,7 +5815,7 @@
             <a:r>
               <a:rPr sz="3400" b="1" i="0">
                 <a:solidFill>
-                  <a:srgbClr val="74591B"/>
+                  <a:srgbClr val="72591D"/>
                 </a:solidFill>
               </a:rPr>
               <a:t>와 주셔서 고맙습니다</a:t>
@@ -5853,7 +5853,7 @@
             <a:r>
               <a:rPr sz="1700" b="0" i="1">
                 <a:solidFill>
-                  <a:srgbClr val="74591B"/>
+                  <a:srgbClr val="72591D"/>
                 </a:solidFill>
               </a:rPr>
               <a:t>잘 살겠습니다</a:t>
@@ -5918,34 +5918,34 @@
         <a:sysClr val="window" lastClr="FFFFFF"/>
       </a:lt1>
       <a:dk2>
-        <a:srgbClr val="74591B"/>
+        <a:srgbClr val="72591D"/>
       </a:dk2>
       <a:lt2>
-        <a:srgbClr val="FBF7EE"/>
+        <a:srgbClr val="FCF9F3"/>
       </a:lt2>
       <a:accent1>
-        <a:srgbClr val="C6992F"/>
+        <a:srgbClr val="DFAD3A"/>
       </a:accent1>
       <a:accent2>
-        <a:srgbClr val="3B8091"/>
+        <a:srgbClr val="339941"/>
       </a:accent2>
       <a:accent3>
-        <a:srgbClr val="74591B"/>
+        <a:srgbClr val="72591D"/>
       </a:accent3>
       <a:accent4>
-        <a:srgbClr val="F5E9CC"/>
+        <a:srgbClr val="F7EDD4"/>
       </a:accent4>
       <a:accent5>
-        <a:srgbClr val="808C60"/>
+        <a:srgbClr val="89A33E"/>
       </a:accent5>
       <a:accent6>
-        <a:srgbClr val="AC9B76"/>
+        <a:srgbClr val="AA9B77"/>
       </a:accent6>
       <a:hlink>
-        <a:srgbClr val="C6992F"/>
+        <a:srgbClr val="DFAD3A"/>
       </a:hlink>
       <a:folHlink>
-        <a:srgbClr val="74591B"/>
+        <a:srgbClr val="72591D"/>
       </a:folHlink>
     </a:clrScheme>
     <a:fontScheme name="Office">
